--- a/DBTUNING/ch20_통계수집_AWR인프라/ch20_통계수집_AWR인프라.pptx
+++ b/DBTUNING/ch20_통계수집_AWR인프라/ch20_통계수집_AWR인프라.pptx
@@ -677,7 +677,7 @@
           <a:lstStyle/>
           <a:p>
             <a:r>
-              <a:t>295에서 296 구간은 7개 세션이 100초 동안 리터럴 파싱·대량 스캔·정렬·잦은 커밋을 섞어 만든 종합 부하입니다. 같은 사건을 8장 AWR은 DB CPU 95.7퍼센트로, 9장 ADDM은 리터럴 사용으로 인한 하드 파싱이라는 진단으로, 10장 ASH는 ON CPU 90.7퍼센트로 보여 줍니다. 세 수치가 어긋나지 않는 것은 모두 같은 스냅샷 구간, 같은 부하를 원천으로 하기 때문이며, 구간을 어떻게 잡았는가가 진단의 질을 좌우한다는 점을 강조합니다.</a:t>
+              <a:t>295에서 296 구간은 7개 세션이 100초 동안 리터럴 파싱·대량 스캔·정렬·잦은 커밋을 섞어 만든 종합 부하입니다. 같은 사건을 ch22 AWR은 DB CPU 95.7퍼센트로, ch24 ADDM은 리터럴 사용으로 인한 하드 파싱이라는 진단으로, ch25 ASH는 ON CPU 90.7퍼센트로 보여 줍니다. 세 수치가 어긋나지 않는 것은 모두 같은 스냅샷 구간, 같은 부하를 원천으로 하기 때문이며, 구간을 어떻게 잡았는가가 진단의 질을 좌우한다는 점을 강조합니다.</a:t>
             </a:r>
           </a:p>
         </p:txBody>
@@ -1307,7 +1307,7 @@
           <a:lstStyle/>
           <a:p>
             <a:r>
-              <a:t>AWR은 오브젝트 통계, 시간 모델, 시스템·세션 통계 일부, 상위 부하 SQL, ASH를 담습니다. 세션 수준을 제외한 대부분 통계의 누적값과 델타값을 함께 보존하는데, 델타는 한 스냅샷과 앞 스냅샷 사이의 변화량입니다. 5장에서 손으로 계산하던 뒤 값 빼기 앞 값을 AWR이 스냅샷을 뜰 때마다 자동으로 저장해 둔다는 점, 그래서 보고서가 구간을 지정하면 델타로 값이 나온다는 점을 설명합니다.</a:t>
+              <a:t>AWR은 오브젝트 통계, 시간 모델, 시스템·세션 통계 일부, 상위 부하 SQL, ASH를 담습니다. 세션 수준을 제외한 대부분 통계의 누적값과 델타값을 함께 보존하는데, 델타는 한 스냅샷과 앞 스냅샷 사이의 변화량입니다. ch19에서 손으로 계산하던 뒤 값 빼기 앞 값을 AWR이 스냅샷을 뜰 때마다 자동으로 저장해 둔다는 점, 그래서 보고서가 구간을 지정하면 델타로 값이 나온다는 점을 설명합니다.</a:t>
             </a:r>
           </a:p>
         </p:txBody>
@@ -1517,7 +1517,7 @@
           <a:lstStyle/>
           <a:p>
             <a:r>
-              <a:t>Statspack은 AWR 이전 시대의 표준 진단 도구였고, 10g에서 AWR·ADDM·ASH가 Diagnostics Pack으로 묶이면서 무상으로 남아 라이선스 미보유 환경의 정식 대안이 되었습니다. 따라서 Statspack을 쓴다는 것은 옛날 방식으로 후퇴한다가 아니라 라이선스 경계 안에서 진단을 계속한다는 뜻입니다. 다만 ADDM 자동 진단·ASH·베이스라인 같은 기능이 없어 보고서를 사람이 읽어야 하므로, Statspack 환경일수록 8장에서 배울 보고서 판독 능력이 더 중요해진다는 점을 강조합니다.</a:t>
+              <a:t>Statspack은 AWR 이전 시대의 표준 진단 도구였고, 10g에서 AWR·ADDM·ASH가 Diagnostics Pack으로 묶이면서 무상으로 남아 라이선스 미보유 환경의 정식 대안이 되었습니다. 따라서 Statspack을 쓴다는 것은 옛날 방식으로 후퇴한다가 아니라 라이선스 경계 안에서 진단을 계속한다는 뜻입니다. 다만 ADDM 자동 진단·ASH·베이스라인 같은 기능이 없어 보고서를 사람이 읽어야 하므로, Statspack 환경일수록 ch22에서 배울 보고서 판독 능력이 더 중요해진다는 점을 강조합니다.</a:t>
             </a:r>
           </a:p>
         </p:txBody>
@@ -1587,7 +1587,7 @@
           <a:lstStyle/>
           <a:p>
             <a:r>
-              <a:t>AWR과 Statspack은 같은 목적의 도구지만 결이 다릅니다. AWR은 Diagnostics Pack이 필요하고 SYSAUX에 저장하며 ADDM·ASH·베이스라인과 통합됩니다. Statspack은 무상이고 PERFSTAT 스키마에 저장하지만 자동 진단이 없어 사람이 보고서를 읽어야 합니다. 선택 기준은 라이선스가 있으면 AWR, 없고 정기 이력이 필요하면 Statspack, 한 구간만 재면 V$ 델타입니다. 세 경로 모두 두 시점의 차이를 부하로 읽는다는 5장의 원리는 같다는 점으로 마무리합니다.</a:t>
+              <a:t>AWR과 Statspack은 같은 목적의 도구지만 결이 다릅니다. AWR은 Diagnostics Pack이 필요하고 SYSAUX에 저장하며 ADDM·ASH·베이스라인과 통합됩니다. Statspack은 무상이고 PERFSTAT 스키마에 저장하지만 자동 진단이 없어 사람이 보고서를 읽어야 합니다. 선택 기준은 라이선스가 있으면 AWR, 없고 정기 이력이 필요하면 Statspack, 한 구간만 재면 V$ 델타입니다. 세 경로 모두 두 시점의 차이를 부하로 읽는다는 ch19의 원리는 같다는 점으로 마무리합니다.</a:t>
             </a:r>
           </a:p>
         </p:txBody>
@@ -1727,7 +1727,7 @@
           <a:lstStyle/>
           <a:p>
             <a:r>
-              <a:t>저장된 AWR 데이터는 보통 보고서로 보지만 DBA_HIST_ 접두어 뷰로 직접 조회할 수도 있습니다. 이 뷰들은 SYS 소유이며 Diagnostics Pack 대상입니다. 이 장에서는 스냅샷 목록의 DBA_HIST_SNAPSHOT, 설정의 DBA_HIST_WR_CONTROL, 베이스라인의 DBA_HIST_BASELINE을 씁니다. 이 뷰 이름들은 V$와 짝을 이뤄 V$SYSSTAT의 역사가 DBA_HIST_SYSSTAT에 쌓입니다. V$로 지금을 보고 DBA_HIST_로 과거를 본다가 5장과 이 장을 잇는 한 줄 요약이며, 라이선스가 없어 못 쓸 때 V$ 델타 계산이 대안의 뿌리임을 강조합니다.</a:t>
+              <a:t>저장된 AWR 데이터는 보통 보고서로 보지만 DBA_HIST_ 접두어 뷰로 직접 조회할 수도 있습니다. 이 뷰들은 SYS 소유이며 Diagnostics Pack 대상입니다. 이 장에서는 스냅샷 목록의 DBA_HIST_SNAPSHOT, 설정의 DBA_HIST_WR_CONTROL, 베이스라인의 DBA_HIST_BASELINE을 씁니다. 이 뷰 이름들은 V$와 짝을 이뤄 V$SYSSTAT의 역사가 DBA_HIST_SYSSTAT에 쌓입니다. V$로 지금을 보고 DBA_HIST_로 과거를 본다가 ch19과 이 장을 잇는 한 줄 요약이며, 라이선스가 없어 못 쓸 때 V$ 델타 계산이 대안의 뿌리임을 강조합니다.</a:t>
             </a:r>
           </a:p>
         </p:txBody>
@@ -2077,7 +2077,7 @@
           <a:lstStyle/>
           <a:p>
             <a:r>
-              <a:t>자동 스냅샷은 정시에 찍히므로 내가 만든 부하가 두 정시에 걸치면 따로 떼어 볼 수 없습니다. 특정 작업의 성능을 정확히 재려면 그 앞뒤에 CREATE_SNAPSHOT으로 스냅샷을 손으로 찍어 구간을 감싸야 합니다. 실습에서는 시작이 295, 부하 실행 후 종료가 296으로 찍혔습니다. 이 295에서 296 구간이 8장 보고서, 9장 ADDM, 10장 ASH의 공통 재료가 된다는 점, 즉 이 장이 뒤 장의 실습 데이터를 만든다는 점을 강조합니다.</a:t>
+              <a:t>자동 스냅샷은 정시에 찍히므로 내가 만든 부하가 두 정시에 걸치면 따로 떼어 볼 수 없습니다. 특정 작업의 성능을 정확히 재려면 그 앞뒤에 CREATE_SNAPSHOT으로 스냅샷을 손으로 찍어 구간을 감싸야 합니다. 실습에서는 시작이 295, 부하 실행 후 종료가 296으로 찍혔습니다. 이 295에서 296 구간이 ch22 보고서, ch24 ADDM, ch25 ASH의 공통 재료가 된다는 점, 즉 이 장이 뒤 장의 실습 데이터를 만든다는 점을 강조합니다.</a:t>
             </a:r>
           </a:p>
         </p:txBody>
@@ -5362,7 +5362,7 @@
                 </a:solidFill>
                 <a:latin typeface="맑은 고딕"/>
               </a:rPr>
-              <a:t>제6장</a:t>
+              <a:t>제ch20</a:t>
             </a:r>
           </a:p>
         </p:txBody>
@@ -7737,7 +7737,7 @@
                 </a:solidFill>
                 <a:latin typeface="맑은 고딕"/>
               </a:rPr>
-              <a:t>•  8장 AWR: DB CPU 95.7% · log file sync · 하드 파싱</a:t>
+              <a:t>•  ch22 AWR: DB CPU 95.7% · log file sync · 하드 파싱</a:t>
             </a:r>
           </a:p>
           <a:p>
@@ -7753,7 +7753,7 @@
                 </a:solidFill>
                 <a:latin typeface="맑은 고딕"/>
               </a:rPr>
-              <a:t>•  9장 ADDM: 'Hard Parse Due to Literal Usage' 진단</a:t>
+              <a:t>•  ch24 ADDM: 'Hard Parse Due to Literal Usage' 진단</a:t>
             </a:r>
           </a:p>
           <a:p>
@@ -7769,7 +7769,7 @@
                 </a:solidFill>
                 <a:latin typeface="맑은 고딕"/>
               </a:rPr>
-              <a:t>•  10장 ASH: ON CPU 90.7%</a:t>
+              <a:t>•  ch25 ASH: ON CPU 90.7%</a:t>
             </a:r>
           </a:p>
           <a:p>
@@ -12497,7 +12497,7 @@
                 </a:solidFill>
                 <a:latin typeface="맑은 고딕"/>
               </a:rPr>
-              <a:t>•  → 보고서를 사람이 읽어야 함 = 8장 판독력이 더 중요</a:t>
+              <a:t>•  → 보고서를 사람이 읽어야 함 = ch22 판독력이 더 중요</a:t>
             </a:r>
           </a:p>
         </p:txBody>
@@ -13084,7 +13084,7 @@
                 </a:solidFill>
                 <a:latin typeface="맑은 고딕"/>
               </a:rPr>
-              <a:t>•  AWR = 휘발성 V$를 스냅샷으로 SYSAUX에 영구 저장 · 8~11장의 토대</a:t>
+              <a:t>•  AWR = 휘발성 V$를 스냅샷으로 SYSAUX에 영구 저장 · ch22~ch23의 토대</a:t>
             </a:r>
           </a:p>
           <a:p>
@@ -14097,7 +14097,7 @@
                 </a:solidFill>
                 <a:latin typeface="맑은 고딕"/>
               </a:rPr>
-              <a:t>•  5장의 '뒤 값-앞 값'을 AWR이 스냅샷마다 자동 저장</a:t>
+              <a:t>•  ch19의 '뒤 값-앞 값'을 AWR이 스냅샷마다 자동 저장</a:t>
             </a:r>
           </a:p>
           <a:p>

--- a/DBTUNING/ch20_통계수집_AWR인프라/ch20_통계수집_AWR인프라.pptx
+++ b/DBTUNING/ch20_통계수집_AWR인프라/ch20_통계수집_AWR인프라.pptx
@@ -5362,7 +5362,7 @@
                 </a:solidFill>
                 <a:latin typeface="맑은 고딕"/>
               </a:rPr>
-              <a:t>제ch20</a:t>
+              <a:t>ch20</a:t>
             </a:r>
           </a:p>
         </p:txBody>

--- a/DBTUNING/ch20_통계수집_AWR인프라/ch20_통계수집_AWR인프라.pptx
+++ b/DBTUNING/ch20_통계수집_AWR인프라/ch20_통계수집_AWR인프라.pptx
@@ -6655,7 +6655,7 @@
                 </a:solidFill>
                 <a:latin typeface="맑은 고딕"/>
               </a:rPr>
-              <a:t>6.4</a:t>
+              <a:t>20.4</a:t>
             </a:r>
           </a:p>
         </p:txBody>
@@ -7882,7 +7882,7 @@
                 </a:solidFill>
                 <a:latin typeface="맑은 고딕"/>
               </a:rPr>
-              <a:t>6.5</a:t>
+              <a:t>20.5</a:t>
             </a:r>
           </a:p>
         </p:txBody>
@@ -9595,7 +9595,7 @@
                 </a:solidFill>
                 <a:latin typeface="맑은 고딕"/>
               </a:rPr>
-              <a:t>6.6</a:t>
+              <a:t>20.6</a:t>
             </a:r>
           </a:p>
         </p:txBody>
@@ -10694,7 +10694,7 @@
                 </a:solidFill>
                 <a:latin typeface="맑은 고딕"/>
               </a:rPr>
-              <a:t>6.7</a:t>
+              <a:t>20.7</a:t>
             </a:r>
           </a:p>
         </p:txBody>
@@ -11559,7 +11559,7 @@
                 </a:solidFill>
                 <a:latin typeface="맑은 고딕"/>
               </a:rPr>
-              <a:t>•  6.2  AWR 인프라 개요 — 무엇을 기억하는가</a:t>
+              <a:t>•  20.2  AWR 인프라 개요 — 무엇을 기억하는가</a:t>
             </a:r>
           </a:p>
           <a:p>
@@ -11575,7 +11575,7 @@
                 </a:solidFill>
                 <a:latin typeface="맑은 고딕"/>
               </a:rPr>
-              <a:t>•  6.3  스냅샷 — 주기와 보존을 정한다</a:t>
+              <a:t>•  20.3  스냅샷 — 주기와 보존을 정한다</a:t>
             </a:r>
           </a:p>
           <a:p>
@@ -11591,7 +11591,7 @@
                 </a:solidFill>
                 <a:latin typeface="맑은 고딕"/>
               </a:rPr>
-              <a:t>•  6.4  수동 스냅샷 — 부하 구간을 손으로 감싼다</a:t>
+              <a:t>•  20.4  수동 스냅샷 — 부하 구간을 손으로 감싼다</a:t>
             </a:r>
           </a:p>
           <a:p>
@@ -11607,7 +11607,7 @@
                 </a:solidFill>
                 <a:latin typeface="맑은 고딕"/>
               </a:rPr>
-              <a:t>•  6.5  AWR 베이스라인 — 필요한 구간을 보호한다</a:t>
+              <a:t>•  20.5  AWR 베이스라인 — 필요한 구간을 보호한다</a:t>
             </a:r>
           </a:p>
           <a:p>
@@ -11623,7 +11623,7 @@
                 </a:solidFill>
                 <a:latin typeface="맑은 고딕"/>
               </a:rPr>
-              <a:t>•  6.6  SYSAUX 용량 관리 — AWR이 차지하는 공간</a:t>
+              <a:t>•  20.6  SYSAUX 용량 관리 — AWR이 차지하는 공간</a:t>
             </a:r>
           </a:p>
           <a:p>
@@ -11639,7 +11639,7 @@
                 </a:solidFill>
                 <a:latin typeface="맑은 고딕"/>
               </a:rPr>
-              <a:t>•  6.7  보존 기간 초과와 데이터 소실</a:t>
+              <a:t>•  20.7  보존 기간 초과와 데이터 소실</a:t>
             </a:r>
           </a:p>
           <a:p>
@@ -11655,7 +11655,7 @@
                 </a:solidFill>
                 <a:latin typeface="맑은 고딕"/>
               </a:rPr>
-              <a:t>•  6.8  Statspack — 라이선스 없는 환경의 대안</a:t>
+              <a:t>•  20.8  Statspack — 라이선스 없는 환경의 대안</a:t>
             </a:r>
           </a:p>
           <a:p>
@@ -11768,7 +11768,7 @@
                 </a:solidFill>
                 <a:latin typeface="맑은 고딕"/>
               </a:rPr>
-              <a:t>6.8</a:t>
+              <a:t>20.8</a:t>
             </a:r>
           </a:p>
         </p:txBody>
@@ -13493,7 +13493,7 @@
                 </a:solidFill>
                 <a:latin typeface="맑은 고딕"/>
               </a:rPr>
-              <a:t>6.2</a:t>
+              <a:t>20.2</a:t>
             </a:r>
           </a:p>
         </p:txBody>
@@ -14680,7 +14680,7 @@
                 </a:solidFill>
                 <a:latin typeface="맑은 고딕"/>
               </a:rPr>
-              <a:t>6.3</a:t>
+              <a:t>20.3</a:t>
             </a:r>
           </a:p>
         </p:txBody>
